--- a/01-精益工具知识库/PPT/06-标准作业与安灯详解.pptx
+++ b/01-精益工具知识库/PPT/06-标准作业与安灯详解.pptx
@@ -1519,6 +1519,10 @@
           </a:solidFill>
           <a:ln/>
         </p:spPr>
+        <p:txBody>
+          <a:bodyPr/>
+          <a:p/>
+        </p:txBody>
       </p:sp>
       <p:sp>
         <p:nvSpPr>
@@ -1541,6 +1545,10 @@
           </a:solidFill>
           <a:ln/>
         </p:spPr>
+        <p:txBody>
+          <a:bodyPr/>
+          <a:p/>
+        </p:txBody>
       </p:sp>
       <p:sp>
         <p:nvSpPr>
@@ -1607,6 +1615,10 @@
             <a:prstDash val="solid"/>
           </a:ln>
         </p:spPr>
+        <p:txBody>
+          <a:bodyPr/>
+          <a:p/>
+        </p:txBody>
       </p:sp>
       <p:sp>
         <p:nvSpPr>
@@ -1680,7 +1692,7 @@
                 <a:ea typeface="Microsoft YaHei" pitchFamily="34" charset="-122"/>
                 <a:cs typeface="Microsoft YaHei" pitchFamily="34" charset="-120"/>
               </a:rPr>
-              <a:t>Standard Work &amp; Andon System  |  紧固件制造专用</a:t>
+              <a:t>Standard Work &amp; Andon System  |  制造专用</a:t>
             </a:r>
             <a:endParaRPr lang="en-US" sz="1600" dirty="0"/>
           </a:p>
@@ -1742,6 +1754,10 @@
             <a:prstDash val="solid"/>
           </a:ln>
         </p:spPr>
+        <p:txBody>
+          <a:bodyPr/>
+          <a:p/>
+        </p:txBody>
       </p:sp>
       <p:sp>
         <p:nvSpPr>
@@ -1767,6 +1783,10 @@
             <a:prstDash val="solid"/>
           </a:ln>
         </p:spPr>
+        <p:txBody>
+          <a:bodyPr/>
+          <a:p/>
+        </p:txBody>
       </p:sp>
       <p:sp>
         <p:nvSpPr>
@@ -1870,6 +1890,10 @@
             <a:prstDash val="solid"/>
           </a:ln>
         </p:spPr>
+        <p:txBody>
+          <a:bodyPr/>
+          <a:p/>
+        </p:txBody>
       </p:sp>
       <p:sp>
         <p:nvSpPr>
@@ -1975,6 +1999,10 @@
             <a:prstDash val="solid"/>
           </a:ln>
         </p:spPr>
+        <p:txBody>
+          <a:bodyPr/>
+          <a:p/>
+        </p:txBody>
       </p:sp>
       <p:sp>
         <p:nvSpPr>
@@ -2000,6 +2028,10 @@
             <a:prstDash val="solid"/>
           </a:ln>
         </p:spPr>
+        <p:txBody>
+          <a:bodyPr/>
+          <a:p/>
+        </p:txBody>
       </p:sp>
       <p:sp>
         <p:nvSpPr>
@@ -2027,6 +2059,10 @@
             <a:prstDash val="solid"/>
           </a:ln>
         </p:spPr>
+        <p:txBody>
+          <a:bodyPr/>
+          <a:p/>
+        </p:txBody>
       </p:sp>
       <p:sp>
         <p:nvSpPr>
@@ -2052,6 +2088,10 @@
             <a:prstDash val="solid"/>
           </a:ln>
         </p:spPr>
+        <p:txBody>
+          <a:bodyPr/>
+          <a:p/>
+        </p:txBody>
       </p:sp>
       <p:sp>
         <p:nvSpPr>
@@ -2191,7 +2231,7 @@
                 <a:ea typeface="Microsoft YaHei" pitchFamily="34" charset="-122"/>
                 <a:cs typeface="Microsoft YaHei" pitchFamily="34" charset="-120"/>
               </a:rPr>
-              <a:t>紧固件案例:</a:t>
+              <a:t>产品案例:</a:t>
             </a:r>
             <a:pPr indent="0" marL="0">
               <a:lnSpc>
@@ -2265,7 +2305,7 @@
                 <a:ea typeface="Microsoft YaHei" pitchFamily="34" charset="-122"/>
                 <a:cs typeface="Microsoft YaHei" pitchFamily="34" charset="-120"/>
               </a:rPr>
-              <a:t>意味着每1.5秒产出一个螺栓</a:t>
+              <a:t>意味着每1.5秒产出一个工件</a:t>
             </a:r>
             <a:endParaRPr lang="en-US" sz="950" dirty="0"/>
           </a:p>
@@ -2297,6 +2337,10 @@
             <a:prstDash val="solid"/>
           </a:ln>
         </p:spPr>
+        <p:txBody>
+          <a:bodyPr/>
+          <a:p/>
+        </p:txBody>
       </p:sp>
       <p:sp>
         <p:nvSpPr>
@@ -2322,6 +2366,10 @@
             <a:prstDash val="solid"/>
           </a:ln>
         </p:spPr>
+        <p:txBody>
+          <a:bodyPr/>
+          <a:p/>
+        </p:txBody>
       </p:sp>
       <p:sp>
         <p:nvSpPr>
@@ -2349,6 +2397,10 @@
             <a:prstDash val="solid"/>
           </a:ln>
         </p:spPr>
+        <p:txBody>
+          <a:bodyPr/>
+          <a:p/>
+        </p:txBody>
       </p:sp>
       <p:sp>
         <p:nvSpPr>
@@ -2374,6 +2426,10 @@
             <a:prstDash val="solid"/>
           </a:ln>
         </p:spPr>
+        <p:txBody>
+          <a:bodyPr/>
+          <a:p/>
+        </p:txBody>
       </p:sp>
       <p:sp>
         <p:nvSpPr>
@@ -2547,7 +2603,7 @@
                 <a:ea typeface="Microsoft YaHei" pitchFamily="34" charset="-122"/>
                 <a:cs typeface="Microsoft YaHei" pitchFamily="34" charset="-120"/>
               </a:rPr>
-              <a:t>紧固件案例:</a:t>
+              <a:t>产品案例:</a:t>
             </a:r>
             <a:pPr indent="0" marL="0">
               <a:lnSpc>
@@ -2564,7 +2620,7 @@
                 <a:ea typeface="Microsoft YaHei" pitchFamily="34" charset="-122"/>
                 <a:cs typeface="Microsoft YaHei" pitchFamily="34" charset="-120"/>
               </a:rPr>
-              <a:t>冷镦: 送料成形冲裁收集</a:t>
+              <a:t>机加工: 送料成形冲裁收集</a:t>
             </a:r>
             <a:pPr indent="0" marL="0">
               <a:lnSpc>
@@ -2636,6 +2692,10 @@
             <a:prstDash val="solid"/>
           </a:ln>
         </p:spPr>
+        <p:txBody>
+          <a:bodyPr/>
+          <a:p/>
+        </p:txBody>
       </p:sp>
       <p:sp>
         <p:nvSpPr>
@@ -2661,6 +2721,10 @@
             <a:prstDash val="solid"/>
           </a:ln>
         </p:spPr>
+        <p:txBody>
+          <a:bodyPr/>
+          <a:p/>
+        </p:txBody>
       </p:sp>
       <p:sp>
         <p:nvSpPr>
@@ -2688,6 +2752,10 @@
             <a:prstDash val="solid"/>
           </a:ln>
         </p:spPr>
+        <p:txBody>
+          <a:bodyPr/>
+          <a:p/>
+        </p:txBody>
       </p:sp>
       <p:sp>
         <p:nvSpPr>
@@ -2713,6 +2781,10 @@
             <a:prstDash val="solid"/>
           </a:ln>
         </p:spPr>
+        <p:txBody>
+          <a:bodyPr/>
+          <a:p/>
+        </p:txBody>
       </p:sp>
       <p:sp>
         <p:nvSpPr>
@@ -2886,7 +2958,7 @@
                 <a:ea typeface="Microsoft YaHei" pitchFamily="34" charset="-122"/>
                 <a:cs typeface="Microsoft YaHei" pitchFamily="34" charset="-120"/>
               </a:rPr>
-              <a:t>紧固件案例:</a:t>
+              <a:t>产品案例:</a:t>
             </a:r>
             <a:pPr indent="0" marL="0">
               <a:lnSpc>
@@ -2903,7 +2975,7 @@
                 <a:ea typeface="Microsoft YaHei" pitchFamily="34" charset="-122"/>
                 <a:cs typeface="Microsoft YaHei" pitchFamily="34" charset="-120"/>
               </a:rPr>
-              <a:t>冷镦自动运行: 约200件</a:t>
+              <a:t>机加工自动运行: 约200件</a:t>
             </a:r>
             <a:pPr indent="0" marL="0">
               <a:lnSpc>
@@ -2920,7 +2992,7 @@
                 <a:ea typeface="Microsoft YaHei" pitchFamily="34" charset="-122"/>
                 <a:cs typeface="Microsoft YaHei" pitchFamily="34" charset="-120"/>
               </a:rPr>
-              <a:t>搓丝缓冲: 约50件</a:t>
+              <a:t>精加工缓冲: 约50件</a:t>
             </a:r>
             <a:pPr indent="0" marL="0">
               <a:lnSpc>
@@ -2986,6 +3058,10 @@
             <a:prstDash val="solid"/>
           </a:ln>
         </p:spPr>
+        <p:txBody>
+          <a:bodyPr/>
+          <a:p/>
+        </p:txBody>
       </p:sp>
       <p:sp>
         <p:nvSpPr>
@@ -3082,6 +3158,10 @@
             <a:prstDash val="solid"/>
           </a:ln>
         </p:spPr>
+        <p:txBody>
+          <a:bodyPr/>
+          <a:p/>
+        </p:txBody>
       </p:sp>
       <p:sp>
         <p:nvSpPr>
@@ -3107,6 +3187,10 @@
             <a:prstDash val="solid"/>
           </a:ln>
         </p:spPr>
+        <p:txBody>
+          <a:bodyPr/>
+          <a:p/>
+        </p:txBody>
       </p:sp>
       <p:sp>
         <p:nvSpPr>
@@ -3210,6 +3294,10 @@
             <a:prstDash val="solid"/>
           </a:ln>
         </p:spPr>
+        <p:txBody>
+          <a:bodyPr/>
+          <a:p/>
+        </p:txBody>
       </p:sp>
       <p:sp>
         <p:nvSpPr>
@@ -3313,6 +3401,10 @@
             <a:prstDash val="solid"/>
           </a:ln>
         </p:spPr>
+        <p:txBody>
+          <a:bodyPr/>
+          <a:p/>
+        </p:txBody>
       </p:sp>
       <p:sp>
         <p:nvSpPr>
@@ -3533,6 +3625,10 @@
             <a:prstDash val="solid"/>
           </a:ln>
         </p:spPr>
+        <p:txBody>
+          <a:bodyPr/>
+          <a:p/>
+        </p:txBody>
       </p:sp>
       <p:sp>
         <p:nvSpPr>
@@ -3567,7 +3663,7 @@
                 <a:ea typeface="Microsoft YaHei" pitchFamily="34" charset="-122"/>
                 <a:cs typeface="Microsoft YaHei" pitchFamily="34" charset="-120"/>
               </a:rPr>
-              <a:t>送料至冷镦机</a:t>
+              <a:t>送料至机加工设备</a:t>
             </a:r>
             <a:endParaRPr lang="en-US" sz="950" dirty="0"/>
           </a:p>
@@ -3753,6 +3849,10 @@
             <a:prstDash val="solid"/>
           </a:ln>
         </p:spPr>
+        <p:txBody>
+          <a:bodyPr/>
+          <a:p/>
+        </p:txBody>
       </p:sp>
       <p:sp>
         <p:nvSpPr>
@@ -3787,7 +3887,7 @@
                 <a:ea typeface="Microsoft YaHei" pitchFamily="34" charset="-122"/>
                 <a:cs typeface="Microsoft YaHei" pitchFamily="34" charset="-120"/>
               </a:rPr>
-              <a:t>冷镦自动成形</a:t>
+              <a:t>机加工自动成形</a:t>
             </a:r>
             <a:endParaRPr lang="en-US" sz="950" dirty="0"/>
           </a:p>
@@ -3973,6 +4073,10 @@
             <a:prstDash val="solid"/>
           </a:ln>
         </p:spPr>
+        <p:txBody>
+          <a:bodyPr/>
+          <a:p/>
+        </p:txBody>
       </p:sp>
       <p:sp>
         <p:nvSpPr>
@@ -4193,6 +4297,10 @@
             <a:prstDash val="solid"/>
           </a:ln>
         </p:spPr>
+        <p:txBody>
+          <a:bodyPr/>
+          <a:p/>
+        </p:txBody>
       </p:sp>
       <p:sp>
         <p:nvSpPr>
@@ -4413,6 +4521,10 @@
             <a:prstDash val="solid"/>
           </a:ln>
         </p:spPr>
+        <p:txBody>
+          <a:bodyPr/>
+          <a:p/>
+        </p:txBody>
       </p:sp>
       <p:sp>
         <p:nvSpPr>
@@ -4633,6 +4745,10 @@
             <a:prstDash val="solid"/>
           </a:ln>
         </p:spPr>
+        <p:txBody>
+          <a:bodyPr/>
+          <a:p/>
+        </p:txBody>
       </p:sp>
       <p:sp>
         <p:nvSpPr>
@@ -4855,6 +4971,10 @@
             <a:prstDash val="solid"/>
           </a:ln>
         </p:spPr>
+        <p:txBody>
+          <a:bodyPr/>
+          <a:p/>
+        </p:txBody>
       </p:sp>
       <p:sp>
         <p:nvSpPr>
@@ -4960,6 +5080,10 @@
             <a:prstDash val="solid"/>
           </a:ln>
         </p:spPr>
+        <p:txBody>
+          <a:bodyPr/>
+          <a:p/>
+        </p:txBody>
       </p:sp>
       <p:sp>
         <p:nvSpPr>
@@ -5065,6 +5189,10 @@
             <a:prstDash val="solid"/>
           </a:ln>
         </p:spPr>
+        <p:txBody>
+          <a:bodyPr/>
+          <a:p/>
+        </p:txBody>
       </p:sp>
       <p:sp>
         <p:nvSpPr>
@@ -5170,6 +5298,10 @@
             <a:prstDash val="solid"/>
           </a:ln>
         </p:spPr>
+        <p:txBody>
+          <a:bodyPr/>
+          <a:p/>
+        </p:txBody>
       </p:sp>
       <p:sp>
         <p:nvSpPr>
@@ -5273,6 +5405,10 @@
             <a:prstDash val="solid"/>
           </a:ln>
         </p:spPr>
+        <p:txBody>
+          <a:bodyPr/>
+          <a:p/>
+        </p:txBody>
       </p:sp>
     </p:spTree>
   </p:cSld>
@@ -5330,6 +5466,10 @@
             <a:prstDash val="solid"/>
           </a:ln>
         </p:spPr>
+        <p:txBody>
+          <a:bodyPr/>
+          <a:p/>
+        </p:txBody>
       </p:sp>
       <p:sp>
         <p:nvSpPr>
@@ -5355,6 +5495,10 @@
             <a:prstDash val="solid"/>
           </a:ln>
         </p:spPr>
+        <p:txBody>
+          <a:bodyPr/>
+          <a:p/>
+        </p:txBody>
       </p:sp>
       <p:sp>
         <p:nvSpPr>
@@ -5458,6 +5602,10 @@
             <a:prstDash val="solid"/>
           </a:ln>
         </p:spPr>
+        <p:txBody>
+          <a:bodyPr/>
+          <a:p/>
+        </p:txBody>
       </p:sp>
       <p:sp>
         <p:nvSpPr>
@@ -5563,6 +5711,10 @@
             <a:prstDash val="solid"/>
           </a:ln>
         </p:spPr>
+        <p:txBody>
+          <a:bodyPr/>
+          <a:p/>
+        </p:txBody>
       </p:sp>
       <p:sp>
         <p:nvSpPr>
@@ -5588,6 +5740,10 @@
             <a:prstDash val="solid"/>
           </a:ln>
         </p:spPr>
+        <p:txBody>
+          <a:bodyPr/>
+          <a:p/>
+        </p:txBody>
       </p:sp>
       <p:sp>
         <p:nvSpPr>
@@ -5615,6 +5771,10 @@
             <a:prstDash val="solid"/>
           </a:ln>
         </p:spPr>
+        <p:txBody>
+          <a:bodyPr/>
+          <a:p/>
+        </p:txBody>
       </p:sp>
       <p:sp>
         <p:nvSpPr>
@@ -5640,6 +5800,10 @@
             <a:prstDash val="solid"/>
           </a:ln>
         </p:spPr>
+        <p:txBody>
+          <a:bodyPr/>
+          <a:p/>
+        </p:txBody>
       </p:sp>
       <p:sp>
         <p:nvSpPr>
@@ -5796,7 +5960,7 @@
                 <a:ea typeface="Microsoft YaHei" pitchFamily="34" charset="-122"/>
                 <a:cs typeface="Microsoft YaHei" pitchFamily="34" charset="-120"/>
               </a:rPr>
-              <a:t>紧固件: 冷镦作业标准书</a:t>
+              <a:t>产品: 机加工作业标准书</a:t>
             </a:r>
             <a:endParaRPr lang="en-US" sz="950" dirty="0"/>
           </a:p>
@@ -5828,6 +5992,10 @@
             <a:prstDash val="solid"/>
           </a:ln>
         </p:spPr>
+        <p:txBody>
+          <a:bodyPr/>
+          <a:p/>
+        </p:txBody>
       </p:sp>
       <p:sp>
         <p:nvSpPr>
@@ -5853,6 +6021,10 @@
             <a:prstDash val="solid"/>
           </a:ln>
         </p:spPr>
+        <p:txBody>
+          <a:bodyPr/>
+          <a:p/>
+        </p:txBody>
       </p:sp>
       <p:sp>
         <p:nvSpPr>
@@ -5880,6 +6052,10 @@
             <a:prstDash val="solid"/>
           </a:ln>
         </p:spPr>
+        <p:txBody>
+          <a:bodyPr/>
+          <a:p/>
+        </p:txBody>
       </p:sp>
       <p:sp>
         <p:nvSpPr>
@@ -5905,6 +6081,10 @@
             <a:prstDash val="solid"/>
           </a:ln>
         </p:spPr>
+        <p:txBody>
+          <a:bodyPr/>
+          <a:p/>
+        </p:txBody>
       </p:sp>
       <p:sp>
         <p:nvSpPr>
@@ -6061,7 +6241,7 @@
                 <a:ea typeface="Microsoft YaHei" pitchFamily="34" charset="-122"/>
                 <a:cs typeface="Microsoft YaHei" pitchFamily="34" charset="-120"/>
               </a:rPr>
-              <a:t>紧固件: 快速换模&lt;10min</a:t>
+              <a:t>产品: 快速换模&lt;10min</a:t>
             </a:r>
             <a:endParaRPr lang="en-US" sz="950" dirty="0"/>
           </a:p>
@@ -6093,6 +6273,10 @@
             <a:prstDash val="solid"/>
           </a:ln>
         </p:spPr>
+        <p:txBody>
+          <a:bodyPr/>
+          <a:p/>
+        </p:txBody>
       </p:sp>
       <p:sp>
         <p:nvSpPr>
@@ -6118,6 +6302,10 @@
             <a:prstDash val="solid"/>
           </a:ln>
         </p:spPr>
+        <p:txBody>
+          <a:bodyPr/>
+          <a:p/>
+        </p:txBody>
       </p:sp>
       <p:sp>
         <p:nvSpPr>
@@ -6145,6 +6333,10 @@
             <a:prstDash val="solid"/>
           </a:ln>
         </p:spPr>
+        <p:txBody>
+          <a:bodyPr/>
+          <a:p/>
+        </p:txBody>
       </p:sp>
       <p:sp>
         <p:nvSpPr>
@@ -6170,6 +6362,10 @@
             <a:prstDash val="solid"/>
           </a:ln>
         </p:spPr>
+        <p:txBody>
+          <a:bodyPr/>
+          <a:p/>
+        </p:txBody>
       </p:sp>
       <p:sp>
         <p:nvSpPr>
@@ -6326,7 +6522,7 @@
                 <a:ea typeface="Microsoft YaHei" pitchFamily="34" charset="-122"/>
                 <a:cs typeface="Microsoft YaHei" pitchFamily="34" charset="-120"/>
               </a:rPr>
-              <a:t>紧固件: 连续流布局</a:t>
+              <a:t>产品: 连续流布局</a:t>
             </a:r>
             <a:endParaRPr lang="en-US" sz="950" dirty="0"/>
           </a:p>
@@ -6358,6 +6554,10 @@
             <a:prstDash val="solid"/>
           </a:ln>
         </p:spPr>
+        <p:txBody>
+          <a:bodyPr/>
+          <a:p/>
+        </p:txBody>
       </p:sp>
       <p:sp>
         <p:nvSpPr>
@@ -6422,6 +6622,10 @@
             <a:prstDash val="solid"/>
           </a:ln>
         </p:spPr>
+        <p:txBody>
+          <a:bodyPr/>
+          <a:p/>
+        </p:txBody>
       </p:sp>
       <p:sp>
         <p:nvSpPr>
@@ -6449,6 +6653,10 @@
             <a:prstDash val="solid"/>
           </a:ln>
         </p:spPr>
+        <p:txBody>
+          <a:bodyPr/>
+          <a:p/>
+        </p:txBody>
       </p:sp>
       <p:sp>
         <p:nvSpPr>
@@ -6513,6 +6721,10 @@
             <a:prstDash val="solid"/>
           </a:ln>
         </p:spPr>
+        <p:txBody>
+          <a:bodyPr/>
+          <a:p/>
+        </p:txBody>
       </p:sp>
       <p:sp>
         <p:nvSpPr>
@@ -6540,6 +6752,10 @@
             <a:prstDash val="solid"/>
           </a:ln>
         </p:spPr>
+        <p:txBody>
+          <a:bodyPr/>
+          <a:p/>
+        </p:txBody>
       </p:sp>
       <p:sp>
         <p:nvSpPr>
@@ -6604,6 +6820,10 @@
             <a:prstDash val="solid"/>
           </a:ln>
         </p:spPr>
+        <p:txBody>
+          <a:bodyPr/>
+          <a:p/>
+        </p:txBody>
       </p:sp>
       <p:sp>
         <p:nvSpPr>
@@ -6631,6 +6851,10 @@
             <a:prstDash val="solid"/>
           </a:ln>
         </p:spPr>
+        <p:txBody>
+          <a:bodyPr/>
+          <a:p/>
+        </p:txBody>
       </p:sp>
       <p:sp>
         <p:nvSpPr>
@@ -6697,6 +6921,10 @@
             <a:prstDash val="solid"/>
           </a:ln>
         </p:spPr>
+        <p:txBody>
+          <a:bodyPr/>
+          <a:p/>
+        </p:txBody>
       </p:sp>
       <p:sp>
         <p:nvSpPr>
@@ -6793,6 +7021,10 @@
             <a:prstDash val="solid"/>
           </a:ln>
         </p:spPr>
+        <p:txBody>
+          <a:bodyPr/>
+          <a:p/>
+        </p:txBody>
       </p:sp>
       <p:sp>
         <p:nvSpPr>
@@ -6818,6 +7050,10 @@
             <a:prstDash val="solid"/>
           </a:ln>
         </p:spPr>
+        <p:txBody>
+          <a:bodyPr/>
+          <a:p/>
+        </p:txBody>
       </p:sp>
       <p:sp>
         <p:nvSpPr>
@@ -6921,6 +7157,10 @@
             <a:prstDash val="solid"/>
           </a:ln>
         </p:spPr>
+        <p:txBody>
+          <a:bodyPr/>
+          <a:p/>
+        </p:txBody>
       </p:sp>
       <p:sp>
         <p:nvSpPr>
@@ -7026,6 +7266,10 @@
             <a:prstDash val="solid"/>
           </a:ln>
         </p:spPr>
+        <p:txBody>
+          <a:bodyPr/>
+          <a:p/>
+        </p:txBody>
       </p:sp>
       <p:sp>
         <p:nvSpPr>
@@ -7051,6 +7295,10 @@
             <a:prstDash val="solid"/>
           </a:ln>
         </p:spPr>
+        <p:txBody>
+          <a:bodyPr/>
+          <a:p/>
+        </p:txBody>
       </p:sp>
       <p:sp>
         <p:nvSpPr>
@@ -7078,6 +7326,10 @@
             <a:prstDash val="solid"/>
           </a:ln>
         </p:spPr>
+        <p:txBody>
+          <a:bodyPr/>
+          <a:p/>
+        </p:txBody>
       </p:sp>
       <p:sp>
         <p:nvSpPr>
@@ -7103,6 +7355,10 @@
             <a:prstDash val="solid"/>
           </a:ln>
         </p:spPr>
+        <p:txBody>
+          <a:bodyPr/>
+          <a:p/>
+        </p:txBody>
       </p:sp>
       <p:sp>
         <p:nvSpPr>
@@ -7245,6 +7501,10 @@
             <a:prstDash val="solid"/>
           </a:ln>
         </p:spPr>
+        <p:txBody>
+          <a:bodyPr/>
+          <a:p/>
+        </p:txBody>
       </p:sp>
       <p:sp>
         <p:nvSpPr>
@@ -7270,6 +7530,10 @@
             <a:prstDash val="solid"/>
           </a:ln>
         </p:spPr>
+        <p:txBody>
+          <a:bodyPr/>
+          <a:p/>
+        </p:txBody>
       </p:sp>
       <p:sp>
         <p:nvSpPr>
@@ -7297,6 +7561,10 @@
             <a:prstDash val="solid"/>
           </a:ln>
         </p:spPr>
+        <p:txBody>
+          <a:bodyPr/>
+          <a:p/>
+        </p:txBody>
       </p:sp>
       <p:sp>
         <p:nvSpPr>
@@ -7322,6 +7590,10 @@
             <a:prstDash val="solid"/>
           </a:ln>
         </p:spPr>
+        <p:txBody>
+          <a:bodyPr/>
+          <a:p/>
+        </p:txBody>
       </p:sp>
       <p:sp>
         <p:nvSpPr>
@@ -7464,6 +7736,10 @@
             <a:prstDash val="solid"/>
           </a:ln>
         </p:spPr>
+        <p:txBody>
+          <a:bodyPr/>
+          <a:p/>
+        </p:txBody>
       </p:sp>
       <p:sp>
         <p:nvSpPr>
@@ -7569,6 +7845,10 @@
             <a:prstDash val="solid"/>
           </a:ln>
         </p:spPr>
+        <p:txBody>
+          <a:bodyPr/>
+          <a:p/>
+        </p:txBody>
       </p:sp>
       <p:sp>
         <p:nvSpPr>
@@ -7674,6 +7954,10 @@
             <a:prstDash val="solid"/>
           </a:ln>
         </p:spPr>
+        <p:txBody>
+          <a:bodyPr/>
+          <a:p/>
+        </p:txBody>
       </p:sp>
       <p:sp>
         <p:nvSpPr>
@@ -7779,6 +8063,10 @@
             <a:prstDash val="solid"/>
           </a:ln>
         </p:spPr>
+        <p:txBody>
+          <a:bodyPr/>
+          <a:p/>
+        </p:txBody>
       </p:sp>
       <p:sp>
         <p:nvSpPr>
@@ -7914,6 +8202,10 @@
             <a:prstDash val="solid"/>
           </a:ln>
         </p:spPr>
+        <p:txBody>
+          <a:bodyPr/>
+          <a:p/>
+        </p:txBody>
       </p:sp>
       <p:sp>
         <p:nvSpPr>
@@ -7939,6 +8231,10 @@
             <a:prstDash val="solid"/>
           </a:ln>
         </p:spPr>
+        <p:txBody>
+          <a:bodyPr/>
+          <a:p/>
+        </p:txBody>
       </p:sp>
       <p:sp>
         <p:nvSpPr>
@@ -8042,6 +8338,10 @@
             <a:prstDash val="solid"/>
           </a:ln>
         </p:spPr>
+        <p:txBody>
+          <a:bodyPr/>
+          <a:p/>
+        </p:txBody>
       </p:sp>
       <p:sp>
         <p:nvSpPr>
@@ -8147,6 +8447,10 @@
             <a:prstDash val="solid"/>
           </a:ln>
         </p:spPr>
+        <p:txBody>
+          <a:bodyPr/>
+          <a:p/>
+        </p:txBody>
       </p:sp>
       <p:sp>
         <p:nvSpPr>
@@ -8294,6 +8598,10 @@
             <a:prstDash val="solid"/>
           </a:ln>
         </p:spPr>
+        <p:txBody>
+          <a:bodyPr/>
+          <a:p/>
+        </p:txBody>
       </p:sp>
       <p:sp>
         <p:nvSpPr>
@@ -8321,6 +8629,10 @@
             <a:prstDash val="solid"/>
           </a:ln>
         </p:spPr>
+        <p:txBody>
+          <a:bodyPr/>
+          <a:p/>
+        </p:txBody>
       </p:sp>
       <p:sp>
         <p:nvSpPr>
@@ -8468,6 +8780,10 @@
             <a:prstDash val="solid"/>
           </a:ln>
         </p:spPr>
+        <p:txBody>
+          <a:bodyPr/>
+          <a:p/>
+        </p:txBody>
       </p:sp>
       <p:sp>
         <p:nvSpPr>
@@ -8495,6 +8811,10 @@
             <a:prstDash val="solid"/>
           </a:ln>
         </p:spPr>
+        <p:txBody>
+          <a:bodyPr/>
+          <a:p/>
+        </p:txBody>
       </p:sp>
       <p:sp>
         <p:nvSpPr>
@@ -8644,6 +8964,10 @@
             <a:prstDash val="solid"/>
           </a:ln>
         </p:spPr>
+        <p:txBody>
+          <a:bodyPr/>
+          <a:p/>
+        </p:txBody>
       </p:sp>
       <p:sp>
         <p:nvSpPr>
@@ -8791,6 +9115,10 @@
             <a:prstDash val="solid"/>
           </a:ln>
         </p:spPr>
+        <p:txBody>
+          <a:bodyPr/>
+          <a:p/>
+        </p:txBody>
       </p:sp>
       <p:sp>
         <p:nvSpPr>
@@ -8818,6 +9146,10 @@
             <a:prstDash val="solid"/>
           </a:ln>
         </p:spPr>
+        <p:txBody>
+          <a:bodyPr/>
+          <a:p/>
+        </p:txBody>
       </p:sp>
       <p:sp>
         <p:nvSpPr>
@@ -8965,6 +9297,10 @@
             <a:prstDash val="solid"/>
           </a:ln>
         </p:spPr>
+        <p:txBody>
+          <a:bodyPr/>
+          <a:p/>
+        </p:txBody>
       </p:sp>
       <p:sp>
         <p:nvSpPr>
@@ -8992,6 +9328,10 @@
             <a:prstDash val="solid"/>
           </a:ln>
         </p:spPr>
+        <p:txBody>
+          <a:bodyPr/>
+          <a:p/>
+        </p:txBody>
       </p:sp>
       <p:sp>
         <p:nvSpPr>
@@ -9178,6 +9518,10 @@
             <a:prstDash val="solid"/>
           </a:ln>
         </p:spPr>
+        <p:txBody>
+          <a:bodyPr/>
+          <a:p/>
+        </p:txBody>
       </p:sp>
       <p:sp>
         <p:nvSpPr>
@@ -9398,6 +9742,10 @@
             <a:prstDash val="solid"/>
           </a:ln>
         </p:spPr>
+        <p:txBody>
+          <a:bodyPr/>
+          <a:p/>
+        </p:txBody>
       </p:sp>
       <p:sp>
         <p:nvSpPr>
@@ -9588,7 +9936,7 @@
                 <a:ea typeface="Microsoft YaHei" pitchFamily="34" charset="-122"/>
                 <a:cs typeface="Microsoft YaHei" pitchFamily="34" charset="-120"/>
               </a:rPr>
-              <a:t>螺栓头部开裂</a:t>
+              <a:t>工件表面开裂</a:t>
             </a:r>
             <a:endParaRPr lang="en-US" sz="950" dirty="0"/>
           </a:p>
@@ -9618,6 +9966,10 @@
             <a:prstDash val="solid"/>
           </a:ln>
         </p:spPr>
+        <p:txBody>
+          <a:bodyPr/>
+          <a:p/>
+        </p:txBody>
       </p:sp>
       <p:sp>
         <p:nvSpPr>
@@ -9808,7 +10160,7 @@
                 <a:ea typeface="Microsoft YaHei" pitchFamily="34" charset="-122"/>
                 <a:cs typeface="Microsoft YaHei" pitchFamily="34" charset="-120"/>
               </a:rPr>
-              <a:t>冷镦机卡料</a:t>
+              <a:t>机加工设备卡料</a:t>
             </a:r>
             <a:endParaRPr lang="en-US" sz="950" dirty="0"/>
           </a:p>
@@ -9838,6 +10190,10 @@
             <a:prstDash val="solid"/>
           </a:ln>
         </p:spPr>
+        <p:txBody>
+          <a:bodyPr/>
+          <a:p/>
+        </p:txBody>
       </p:sp>
       <p:sp>
         <p:nvSpPr>
@@ -10028,7 +10384,7 @@
                 <a:ea typeface="Microsoft YaHei" pitchFamily="34" charset="-122"/>
                 <a:cs typeface="Microsoft YaHei" pitchFamily="34" charset="-120"/>
               </a:rPr>
-              <a:t>线材不足</a:t>
+              <a:t>原材料不足</a:t>
             </a:r>
             <a:endParaRPr lang="en-US" sz="950" dirty="0"/>
           </a:p>
@@ -10058,6 +10414,10 @@
             <a:prstDash val="solid"/>
           </a:ln>
         </p:spPr>
+        <p:txBody>
+          <a:bodyPr/>
+          <a:p/>
+        </p:txBody>
       </p:sp>
       <p:sp>
         <p:nvSpPr>
@@ -10310,6 +10670,10 @@
             <a:prstDash val="solid"/>
           </a:ln>
         </p:spPr>
+        <p:txBody>
+          <a:bodyPr/>
+          <a:p/>
+        </p:txBody>
       </p:sp>
       <p:sp>
         <p:nvSpPr>
@@ -10335,6 +10699,10 @@
             <a:prstDash val="solid"/>
           </a:ln>
         </p:spPr>
+        <p:txBody>
+          <a:bodyPr/>
+          <a:p/>
+        </p:txBody>
       </p:sp>
       <p:sp>
         <p:nvSpPr>
@@ -10438,6 +10806,10 @@
             <a:prstDash val="solid"/>
           </a:ln>
         </p:spPr>
+        <p:txBody>
+          <a:bodyPr/>
+          <a:p/>
+        </p:txBody>
       </p:sp>
       <p:sp>
         <p:nvSpPr>
@@ -10543,6 +10915,10 @@
             <a:prstDash val="solid"/>
           </a:ln>
         </p:spPr>
+        <p:txBody>
+          <a:bodyPr/>
+          <a:p/>
+        </p:txBody>
       </p:sp>
       <p:sp>
         <p:nvSpPr>
@@ -10648,6 +11024,10 @@
             <a:prstDash val="solid"/>
           </a:ln>
         </p:spPr>
+        <p:txBody>
+          <a:bodyPr/>
+          <a:p/>
+        </p:txBody>
       </p:sp>
       <p:sp>
         <p:nvSpPr>
@@ -10753,6 +11133,10 @@
             <a:prstDash val="solid"/>
           </a:ln>
         </p:spPr>
+        <p:txBody>
+          <a:bodyPr/>
+          <a:p/>
+        </p:txBody>
       </p:sp>
       <p:sp>
         <p:nvSpPr>
@@ -10858,6 +11242,10 @@
             <a:prstDash val="solid"/>
           </a:ln>
         </p:spPr>
+        <p:txBody>
+          <a:bodyPr/>
+          <a:p/>
+        </p:txBody>
       </p:sp>
       <p:sp>
         <p:nvSpPr>
@@ -11041,6 +11429,10 @@
             <a:prstDash val="solid"/>
           </a:ln>
         </p:spPr>
+        <p:txBody>
+          <a:bodyPr/>
+          <a:p/>
+        </p:txBody>
       </p:sp>
       <p:sp>
         <p:nvSpPr>
@@ -11146,6 +11538,10 @@
             <a:prstDash val="solid"/>
           </a:ln>
         </p:spPr>
+        <p:txBody>
+          <a:bodyPr/>
+          <a:p/>
+        </p:txBody>
       </p:sp>
       <p:sp>
         <p:nvSpPr>
@@ -11251,6 +11647,10 @@
             <a:prstDash val="solid"/>
           </a:ln>
         </p:spPr>
+        <p:txBody>
+          <a:bodyPr/>
+          <a:p/>
+        </p:txBody>
       </p:sp>
       <p:sp>
         <p:nvSpPr>
@@ -11356,6 +11756,10 @@
             <a:prstDash val="solid"/>
           </a:ln>
         </p:spPr>
+        <p:txBody>
+          <a:bodyPr/>
+          <a:p/>
+        </p:txBody>
       </p:sp>
       <p:sp>
         <p:nvSpPr>
@@ -11461,6 +11865,10 @@
             <a:prstDash val="solid"/>
           </a:ln>
         </p:spPr>
+        <p:txBody>
+          <a:bodyPr/>
+          <a:p/>
+        </p:txBody>
       </p:sp>
       <p:sp>
         <p:nvSpPr>
@@ -11564,6 +11972,10 @@
             <a:prstDash val="solid"/>
           </a:ln>
         </p:spPr>
+        <p:txBody>
+          <a:bodyPr/>
+          <a:p/>
+        </p:txBody>
       </p:sp>
       <p:sp>
         <p:nvSpPr>
@@ -11628,6 +12040,10 @@
             <a:prstDash val="solid"/>
           </a:ln>
         </p:spPr>
+        <p:txBody>
+          <a:bodyPr/>
+          <a:p/>
+        </p:txBody>
       </p:sp>
       <p:sp>
         <p:nvSpPr>
@@ -11692,6 +12108,10 @@
             <a:prstDash val="solid"/>
           </a:ln>
         </p:spPr>
+        <p:txBody>
+          <a:bodyPr/>
+          <a:p/>
+        </p:txBody>
       </p:sp>
       <p:sp>
         <p:nvSpPr>
@@ -11756,6 +12176,10 @@
             <a:prstDash val="solid"/>
           </a:ln>
         </p:spPr>
+        <p:txBody>
+          <a:bodyPr/>
+          <a:p/>
+        </p:txBody>
       </p:sp>
       <p:sp>
         <p:nvSpPr>
@@ -11820,6 +12244,10 @@
             <a:prstDash val="solid"/>
           </a:ln>
         </p:spPr>
+        <p:txBody>
+          <a:bodyPr/>
+          <a:p/>
+        </p:txBody>
       </p:sp>
       <p:sp>
         <p:nvSpPr>
@@ -11884,6 +12312,10 @@
             <a:prstDash val="solid"/>
           </a:ln>
         </p:spPr>
+        <p:txBody>
+          <a:bodyPr/>
+          <a:p/>
+        </p:txBody>
       </p:sp>
       <p:sp>
         <p:nvSpPr>
@@ -11909,6 +12341,10 @@
             <a:prstDash val="solid"/>
           </a:ln>
         </p:spPr>
+        <p:txBody>
+          <a:bodyPr/>
+          <a:p/>
+        </p:txBody>
       </p:sp>
       <p:sp>
         <p:nvSpPr>
@@ -11934,6 +12370,10 @@
             <a:prstDash val="solid"/>
           </a:ln>
         </p:spPr>
+        <p:txBody>
+          <a:bodyPr/>
+          <a:p/>
+        </p:txBody>
       </p:sp>
       <p:sp>
         <p:nvSpPr>
@@ -11959,6 +12399,10 @@
             <a:prstDash val="solid"/>
           </a:ln>
         </p:spPr>
+        <p:txBody>
+          <a:bodyPr/>
+          <a:p/>
+        </p:txBody>
       </p:sp>
       <p:sp>
         <p:nvSpPr>
@@ -11984,6 +12428,10 @@
             <a:prstDash val="solid"/>
           </a:ln>
         </p:spPr>
+        <p:txBody>
+          <a:bodyPr/>
+          <a:p/>
+        </p:txBody>
       </p:sp>
       <p:sp>
         <p:nvSpPr>
@@ -12011,6 +12459,10 @@
             <a:prstDash val="solid"/>
           </a:ln>
         </p:spPr>
+        <p:txBody>
+          <a:bodyPr/>
+          <a:p/>
+        </p:txBody>
       </p:sp>
       <p:sp>
         <p:nvSpPr>
@@ -12107,6 +12559,10 @@
             <a:prstDash val="solid"/>
           </a:ln>
         </p:spPr>
+        <p:txBody>
+          <a:bodyPr/>
+          <a:p/>
+        </p:txBody>
       </p:sp>
       <p:sp>
         <p:nvSpPr>
@@ -12214,6 +12670,10 @@
             <a:prstDash val="solid"/>
           </a:ln>
         </p:spPr>
+        <p:txBody>
+          <a:bodyPr/>
+          <a:p/>
+        </p:txBody>
       </p:sp>
       <p:sp>
         <p:nvSpPr>
@@ -12239,6 +12699,10 @@
             <a:prstDash val="solid"/>
           </a:ln>
         </p:spPr>
+        <p:txBody>
+          <a:bodyPr/>
+          <a:p/>
+        </p:txBody>
       </p:sp>
       <p:sp>
         <p:nvSpPr>
@@ -12266,6 +12730,10 @@
             <a:prstDash val="solid"/>
           </a:ln>
         </p:spPr>
+        <p:txBody>
+          <a:bodyPr/>
+          <a:p/>
+        </p:txBody>
       </p:sp>
       <p:sp>
         <p:nvSpPr>
@@ -12291,6 +12759,10 @@
             <a:prstDash val="solid"/>
           </a:ln>
         </p:spPr>
+        <p:txBody>
+          <a:bodyPr/>
+          <a:p/>
+        </p:txBody>
       </p:sp>
       <p:sp>
         <p:nvSpPr>
@@ -12484,6 +12956,10 @@
             <a:prstDash val="solid"/>
           </a:ln>
         </p:spPr>
+        <p:txBody>
+          <a:bodyPr/>
+          <a:p/>
+        </p:txBody>
       </p:sp>
       <p:sp>
         <p:nvSpPr>
@@ -12509,6 +12985,10 @@
             <a:prstDash val="solid"/>
           </a:ln>
         </p:spPr>
+        <p:txBody>
+          <a:bodyPr/>
+          <a:p/>
+        </p:txBody>
       </p:sp>
       <p:sp>
         <p:nvSpPr>
@@ -12536,6 +13016,10 @@
             <a:prstDash val="solid"/>
           </a:ln>
         </p:spPr>
+        <p:txBody>
+          <a:bodyPr/>
+          <a:p/>
+        </p:txBody>
       </p:sp>
       <p:sp>
         <p:nvSpPr>
@@ -12561,6 +13045,10 @@
             <a:prstDash val="solid"/>
           </a:ln>
         </p:spPr>
+        <p:txBody>
+          <a:bodyPr/>
+          <a:p/>
+        </p:txBody>
       </p:sp>
       <p:sp>
         <p:nvSpPr>
@@ -12752,6 +13240,10 @@
             <a:prstDash val="solid"/>
           </a:ln>
         </p:spPr>
+        <p:txBody>
+          <a:bodyPr/>
+          <a:p/>
+        </p:txBody>
       </p:sp>
       <p:sp>
         <p:nvSpPr>
